--- a/make_presentation/templates/templates/premium/no_logo_3.pptx
+++ b/make_presentation/templates/templates/premium/no_logo_3.pptx
@@ -297,7 +297,7 @@
             <a:pPr algn="r">
               <a:buNone/>
             </a:pPr>
-            <a:fld id="{AEABEF34-7C2E-4516-BC0A-6561FC2DC0C5}" type="slidenum">
+            <a:fld id="{43C6BDF6-7430-48D3-B18F-81E371F6F06D}" type="slidenum">
               <a:rPr b="0" lang="en-US" sz="1400" spc="-1" strike="noStrike">
                 <a:latin typeface="Times New Roman"/>
               </a:rPr>
@@ -438,7 +438,7 @@
               </a:lnSpc>
               <a:buNone/>
             </a:pPr>
-            <a:fld id="{23DA9E70-3520-4D8D-A908-B36185279901}" type="slidenum">
+            <a:fld id="{F5F77E98-413F-48B6-A474-C8A727AD0655}" type="slidenum">
               <a:rPr b="0" lang="en-US" sz="1800" spc="-1" strike="noStrike">
                 <a:solidFill>
                   <a:srgbClr val="000000"/>
@@ -582,7 +582,7 @@
               </a:lnSpc>
               <a:buNone/>
             </a:pPr>
-            <a:fld id="{C31224DB-E717-4DF6-9E39-E72E3E000012}" type="slidenum">
+            <a:fld id="{849AF81B-0D74-4ACB-B3FA-D56F79243826}" type="slidenum">
               <a:rPr b="0" lang="en-US" sz="1800" spc="-1" strike="noStrike">
                 <a:solidFill>
                   <a:srgbClr val="000000"/>
@@ -726,7 +726,7 @@
               </a:lnSpc>
               <a:buNone/>
             </a:pPr>
-            <a:fld id="{20368A2E-8271-4A7B-A438-58024EEAB92D}" type="slidenum">
+            <a:fld id="{67F5BB77-754F-45B2-A1DD-61EF303F21DF}" type="slidenum">
               <a:rPr b="0" lang="en-US" sz="1800" spc="-1" strike="noStrike">
                 <a:solidFill>
                   <a:srgbClr val="000000"/>
@@ -2769,7 +2769,7 @@
         <p:spPr>
           <a:xfrm>
             <a:off x="457200" y="4027680"/>
-            <a:ext cx="10515600" cy="2144520"/>
+            <a:ext cx="10928880" cy="2030760"/>
           </a:xfrm>
           <a:prstGeom prst="rect">
             <a:avLst/>
@@ -2800,7 +2800,7 @@
               </a:tabLst>
             </a:pPr>
             <a:r>
-              <a:rPr b="1" lang="en-US" sz="4000" spc="-1" strike="noStrike">
+              <a:rPr b="1" lang="en-US" sz="4800" spc="-1" strike="noStrike">
                 <a:solidFill>
                   <a:srgbClr val="ffffff"/>
                 </a:solidFill>
@@ -2809,7 +2809,7 @@
               </a:rPr>
               <a:t>TITLE</a:t>
             </a:r>
-            <a:endParaRPr b="0" lang="en-US" sz="4000" spc="-1" strike="noStrike">
+            <a:endParaRPr b="0" lang="en-US" sz="4800" spc="-1" strike="noStrike">
               <a:latin typeface="Arial"/>
             </a:endParaRPr>
           </a:p>
